--- a/Raj Subedi Assignment 2 9120.pptx
+++ b/Raj Subedi Assignment 2 9120.pptx
@@ -3620,7 +3620,7 @@
         </p:nvSpPr>
         <p:spPr>
           <a:xfrm>
-            <a:off x="2162432" y="3941806"/>
+            <a:off x="1977081" y="5387546"/>
             <a:ext cx="7933038" cy="646331"/>
           </a:xfrm>
           <a:prstGeom prst="rect">
@@ -3659,7 +3659,7 @@
         </p:nvSpPr>
         <p:spPr>
           <a:xfrm>
-            <a:off x="2162432" y="753762"/>
+            <a:off x="3657599" y="1705232"/>
             <a:ext cx="6771502" cy="646331"/>
           </a:xfrm>
           <a:prstGeom prst="rect">
@@ -3675,15 +3675,20 @@
           <a:p>
             <a:r>
               <a:rPr lang="en-US" dirty="0"/>
-              <a:t>Python codes used to generate </a:t>
-            </a:r>
-            <a:r>
-              <a:rPr lang="en-US"/>
-              <a:t>the figures:</a:t>
-            </a:r>
-          </a:p>
-          <a:p>
-            <a:endParaRPr lang="en-US" dirty="0"/>
+              <a:t>Python codes used to generate the figures:</a:t>
+            </a:r>
+          </a:p>
+          <a:p>
+            <a:r>
+              <a:rPr lang="en-US" dirty="0">
+                <a:hlinkClick r:id="rId2"/>
+              </a:rPr>
+              <a:t>https://github.com/rajsubediresearch/PH9120</a:t>
+            </a:r>
+            <a:r>
+              <a:rPr lang="en-US" dirty="0"/>
+              <a:t> </a:t>
+            </a:r>
           </a:p>
         </p:txBody>
       </p:sp>

--- a/Raj Subedi Assignment 2 9120.pptx
+++ b/Raj Subedi Assignment 2 9120.pptx
@@ -229,7 +229,7 @@
           <a:p>
             <a:fld id="{36463AFA-3541-4762-B8A9-D5830FF42E40}" type="datetimeFigureOut">
               <a:rPr lang="en-US" smtClean="0"/>
-              <a:t>10/7/2026</a:t>
+              <a:t>10/8/2026</a:t>
             </a:fld>
             <a:endParaRPr lang="en-US"/>
           </a:p>
@@ -2110,7 +2110,7 @@
           <a:p>
             <a:fld id="{52CE7DAE-68BE-48C1-AB63-9A85F7ADE3FD}" type="datetimeFigureOut">
               <a:rPr lang="en-US" smtClean="0"/>
-              <a:t>10/7/2026</a:t>
+              <a:t>10/8/2026</a:t>
             </a:fld>
             <a:endParaRPr lang="en-US"/>
           </a:p>
@@ -6215,30 +6215,6 @@
           </a:p>
         </p:txBody>
       </p:sp>
-      <p:pic>
-        <p:nvPicPr>
-          <p:cNvPr id="3" name="Image 0" descr="/tmp/claude-0/-home-claude/ebe111b5-50b2-551c-816b-73fdc7adf86c/scratchpad/A2/Figure3_mediation.png"/>
-          <p:cNvPicPr>
-            <a:picLocks noChangeAspect="1"/>
-          </p:cNvPicPr>
-          <p:nvPr/>
-        </p:nvPicPr>
-        <p:blipFill>
-          <a:blip r:embed="rId3"/>
-          <a:stretch>
-            <a:fillRect/>
-          </a:stretch>
-        </p:blipFill>
-        <p:spPr>
-          <a:xfrm>
-            <a:off x="548640" y="796374"/>
-            <a:ext cx="11329133" cy="4250239"/>
-          </a:xfrm>
-          <a:prstGeom prst="rect">
-            <a:avLst/>
-          </a:prstGeom>
-        </p:spPr>
-      </p:pic>
       <p:sp>
         <p:nvSpPr>
           <p:cNvPr id="4" name="Shape 1"/>
@@ -6430,6 +6406,36 @@
           </a:p>
         </p:txBody>
       </p:sp>
+      <p:pic>
+        <p:nvPicPr>
+          <p:cNvPr id="9" name="Image 0" descr="/tmp/claude-0/-home-claude/ebe111b5-50b2-551c-816b-73fdc7adf86c/scratchpad/A2/Figure3_mediation.png">
+            <a:extLst>
+              <a:ext uri="{FF2B5EF4-FFF2-40B4-BE49-F238E27FC236}">
+                <a16:creationId xmlns:a16="http://schemas.microsoft.com/office/drawing/2014/main" id="{6760D89A-02AC-9868-25F1-A2F464E1DF18}"/>
+              </a:ext>
+            </a:extLst>
+          </p:cNvPr>
+          <p:cNvPicPr>
+            <a:picLocks noChangeAspect="1"/>
+          </p:cNvPicPr>
+          <p:nvPr/>
+        </p:nvPicPr>
+        <p:blipFill>
+          <a:blip r:embed="rId3"/>
+          <a:stretch>
+            <a:fillRect/>
+          </a:stretch>
+        </p:blipFill>
+        <p:spPr>
+          <a:xfrm>
+            <a:off x="548639" y="1005839"/>
+            <a:ext cx="10925047" cy="3677371"/>
+          </a:xfrm>
+          <a:prstGeom prst="rect">
+            <a:avLst/>
+          </a:prstGeom>
+        </p:spPr>
+      </p:pic>
     </p:spTree>
   </p:cSld>
   <p:clrMapOvr>
